--- a/training/decks/t1-sermon-practice.pptx
+++ b/training/decks/t1-sermon-practice.pptx
@@ -516,7 +516,12 @@
           </a:p>
           <a:p>
             <a:r>
-              <a:t>complete, the next Space goes to the next slide. Watch Next on the right to see which.</a:t>
+              <a:t>complete, the next Space goes to the next slide. While a slide with builds is on air, a panel</a:t>
+            </a:r>
+          </a:p>
+          <a:p>
+            <a:r>
+              <a:t>above the wall shows what is on screen beside the next click, and how many clicks are left.</a:t>
             </a:r>
           </a:p>
         </p:txBody>
@@ -746,12 +751,12 @@
           </a:p>
           <a:p>
             <a:r>
-              <a:t>Operator: if the preacher jumps ahead ("skip to the last slide"), click that slide in the</a:t>
-            </a:r>
-          </a:p>
-          <a:p>
-            <a:r>
-              <a:t>strip under the live picture. It goes on air straight away.</a:t>
+              <a:t>Operator: if the preacher jumps ahead ("skip to the last slide"), click that slide's card on</a:t>
+            </a:r>
+          </a:p>
+          <a:p>
+            <a:r>
+              <a:t>the wall. It goes on air straight away.</a:t>
             </a:r>
           </a:p>
         </p:txBody>
@@ -831,7 +836,7 @@
           </a:p>
           <a:p>
             <a:r>
-              <a:t>or Blank if nothing should be on the screen.</a:t>
+              <a:t>or Idle if the room should see the idle screen.</a:t>
             </a:r>
           </a:p>
         </p:txBody>

--- a/training/decks/t1-sermon-practice.pptx
+++ b/training/decks/t1-sermon-practice.pptx
@@ -516,12 +516,12 @@
           </a:p>
           <a:p>
             <a:r>
-              <a:t>complete, the next Space goes to the next slide. While a slide with builds is on air, a panel</a:t>
-            </a:r>
-          </a:p>
-          <a:p>
-            <a:r>
-              <a:t>above the wall shows what is on screen beside the next click, and how many clicks are left.</a:t>
+              <a:t>complete, the next Space goes to the next slide. While a slide with builds is on air, the On air</a:t>
+            </a:r>
+          </a:p>
+          <a:p>
+            <a:r>
+              <a:t>box on the right shows what the next click brings, and how many clicks are left.</a:t>
             </a:r>
           </a:p>
         </p:txBody>
